--- a/CRM System/documents/(CRM) System.pptx
+++ b/CRM System/documents/(CRM) System.pptx
@@ -11,6 +11,7 @@
     <p:sldId id="259" r:id="rId5"/>
     <p:sldId id="260" r:id="rId6"/>
     <p:sldId id="261" r:id="rId7"/>
+    <p:sldId id="262" r:id="rId8"/>
   </p:sldIdLst>
   <p:sldSz cx="12192000" cy="6858000"/>
   <p:notesSz cx="6858000" cy="9144000"/>
@@ -109,6 +110,11 @@
       </a:defRPr>
     </a:lvl9pPr>
   </p:defaultTextStyle>
+  <p:extLst>
+    <p:ext uri="{EFAFB233-063F-42B5-8137-9DF3F51BA10A}">
+      <p15:sldGuideLst xmlns:p15="http://schemas.microsoft.com/office/powerpoint/2012/main"/>
+    </p:ext>
+  </p:extLst>
 </p:presentation>
 </file>
 
@@ -265,7 +271,7 @@
           <a:p>
             <a:fld id="{D1D1EADE-8E88-4C7C-8AC5-FB148DE4940E}" type="datetime1">
               <a:rPr lang="en-US" smtClean="0"/>
-              <a:t>3/9/26</a:t>
+              <a:t>3/13/26</a:t>
             </a:fld>
             <a:endParaRPr lang="en-US"/>
           </a:p>
@@ -465,7 +471,7 @@
           <a:p>
             <a:fld id="{EC3C8B9C-477D-492A-96AD-1FC2CC997A73}" type="datetime1">
               <a:rPr lang="en-US" smtClean="0"/>
-              <a:t>3/9/26</a:t>
+              <a:t>3/13/26</a:t>
             </a:fld>
             <a:endParaRPr lang="en-US"/>
           </a:p>
@@ -675,7 +681,7 @@
           <a:p>
             <a:fld id="{42D3AED5-E26D-4E29-B1B3-7847B6779594}" type="datetime1">
               <a:rPr lang="en-US" smtClean="0"/>
-              <a:t>3/9/26</a:t>
+              <a:t>3/13/26</a:t>
             </a:fld>
             <a:endParaRPr lang="en-US"/>
           </a:p>
@@ -875,7 +881,7 @@
           <a:p>
             <a:fld id="{157B6794-849E-4626-908B-D15793550EFB}" type="datetime1">
               <a:rPr lang="en-US" smtClean="0"/>
-              <a:t>3/9/26</a:t>
+              <a:t>3/13/26</a:t>
             </a:fld>
             <a:endParaRPr lang="en-US"/>
           </a:p>
@@ -1151,7 +1157,7 @@
           <a:p>
             <a:fld id="{63DB64E7-5594-42A3-ADBF-E95A7ACEAD64}" type="datetime1">
               <a:rPr lang="en-US" smtClean="0"/>
-              <a:t>3/9/26</a:t>
+              <a:t>3/13/26</a:t>
             </a:fld>
             <a:endParaRPr lang="en-US"/>
           </a:p>
@@ -1424,7 +1430,7 @@
           <a:p>
             <a:fld id="{18462B0B-D248-4FFB-8695-AD7FA4B1284A}" type="datetime1">
               <a:rPr lang="en-US" smtClean="0"/>
-              <a:t>3/9/26</a:t>
+              <a:t>3/13/26</a:t>
             </a:fld>
             <a:endParaRPr lang="en-US"/>
           </a:p>
@@ -1847,7 +1853,7 @@
           <a:p>
             <a:fld id="{D0378EFB-9159-4510-B73F-4F0409ADE937}" type="datetime1">
               <a:rPr lang="en-US" smtClean="0"/>
-              <a:t>3/9/26</a:t>
+              <a:t>3/13/26</a:t>
             </a:fld>
             <a:endParaRPr lang="en-US"/>
           </a:p>
@@ -1989,7 +1995,7 @@
           <a:p>
             <a:fld id="{89BC9412-2452-4BED-A324-9D8C115361AD}" type="datetime1">
               <a:rPr lang="en-US" smtClean="0"/>
-              <a:t>3/9/26</a:t>
+              <a:t>3/13/26</a:t>
             </a:fld>
             <a:endParaRPr lang="en-US"/>
           </a:p>
@@ -2102,7 +2108,7 @@
           <a:p>
             <a:fld id="{F5318F62-D251-40E8-A23C-F4CFE9FEAB41}" type="datetime1">
               <a:rPr lang="en-US" smtClean="0"/>
-              <a:t>3/9/26</a:t>
+              <a:t>3/13/26</a:t>
             </a:fld>
             <a:endParaRPr lang="en-US"/>
           </a:p>
@@ -2415,7 +2421,7 @@
           <a:p>
             <a:fld id="{44F76144-149E-4874-93A5-554A0357CF82}" type="datetime1">
               <a:rPr lang="en-US" smtClean="0"/>
-              <a:t>3/9/26</a:t>
+              <a:t>3/13/26</a:t>
             </a:fld>
             <a:endParaRPr lang="en-US"/>
           </a:p>
@@ -2708,7 +2714,7 @@
           <a:p>
             <a:fld id="{50BA65D8-0540-4835-AE5C-25D29DBA01BE}" type="datetime1">
               <a:rPr lang="en-US" smtClean="0"/>
-              <a:t>3/9/26</a:t>
+              <a:t>3/13/26</a:t>
             </a:fld>
             <a:endParaRPr lang="en-US"/>
           </a:p>
@@ -2950,7 +2956,7 @@
           <a:p>
             <a:fld id="{E31BA835-12AC-4E8F-955A-EA3F4DE2791F}" type="datetime1">
               <a:rPr lang="en-US" smtClean="0"/>
-              <a:t>3/9/26</a:t>
+              <a:t>3/13/26</a:t>
             </a:fld>
             <a:endParaRPr lang="en-US"/>
           </a:p>
@@ -3563,17 +3569,7 @@
           </a:bodyPr>
           <a:lstStyle/>
           <a:p>
-            <a:r>
-              <a:rPr lang="en-US" dirty="0"/>
-              <a:t>Customer Relationship Management</a:t>
-            </a:r>
-            <a:br>
-              <a:rPr lang="en-US" dirty="0"/>
-            </a:br>
-            <a:r>
-              <a:rPr lang="en-US" dirty="0"/>
-              <a:t>(CRM) System</a:t>
-            </a:r>
+            <a:endParaRPr lang="en-US" dirty="0"/>
           </a:p>
         </p:txBody>
       </p:sp>
@@ -3758,6 +3754,192 @@
           </a:fontRef>
         </p:style>
       </p:cxnSp>
+      <p:pic>
+        <p:nvPicPr>
+          <p:cNvPr id="5" name="Picture 4">
+            <a:extLst>
+              <a:ext uri="{FF2B5EF4-FFF2-40B4-BE49-F238E27FC236}">
+                <a16:creationId xmlns:a16="http://schemas.microsoft.com/office/drawing/2014/main" id="{CDE54DD7-444F-629D-433A-76365C2E45B4}"/>
+              </a:ext>
+            </a:extLst>
+          </p:cNvPr>
+          <p:cNvPicPr>
+            <a:picLocks noChangeAspect="1"/>
+          </p:cNvPicPr>
+          <p:nvPr/>
+        </p:nvPicPr>
+        <p:blipFill>
+          <a:blip r:embed="rId3"/>
+          <a:stretch>
+            <a:fillRect/>
+          </a:stretch>
+        </p:blipFill>
+        <p:spPr>
+          <a:xfrm>
+            <a:off x="-1" y="0"/>
+            <a:ext cx="12192000" cy="6858000"/>
+          </a:xfrm>
+          <a:prstGeom prst="rect">
+            <a:avLst/>
+          </a:prstGeom>
+        </p:spPr>
+      </p:pic>
+      <p:sp>
+        <p:nvSpPr>
+          <p:cNvPr id="7" name="TextBox 6">
+            <a:extLst>
+              <a:ext uri="{FF2B5EF4-FFF2-40B4-BE49-F238E27FC236}">
+                <a16:creationId xmlns:a16="http://schemas.microsoft.com/office/drawing/2014/main" id="{67E64779-DA06-DFC0-2616-251266132AA2}"/>
+              </a:ext>
+            </a:extLst>
+          </p:cNvPr>
+          <p:cNvSpPr txBox="1"/>
+          <p:nvPr/>
+        </p:nvSpPr>
+        <p:spPr>
+          <a:xfrm>
+            <a:off x="2989943" y="3278619"/>
+            <a:ext cx="6212114" cy="646331"/>
+          </a:xfrm>
+          <a:prstGeom prst="rect">
+            <a:avLst/>
+          </a:prstGeom>
+          <a:noFill/>
+        </p:spPr>
+        <p:txBody>
+          <a:bodyPr wrap="square">
+            <a:spAutoFit/>
+          </a:bodyPr>
+          <a:lstStyle/>
+          <a:p>
+            <a:pPr algn="ctr"/>
+            <a:r>
+              <a:rPr lang="en-US" dirty="0">
+                <a:solidFill>
+                  <a:schemeClr val="bg1"/>
+                </a:solidFill>
+              </a:rPr>
+              <a:t>Customer Relationship Management</a:t>
+            </a:r>
+            <a:br>
+              <a:rPr lang="en-US" dirty="0">
+                <a:solidFill>
+                  <a:schemeClr val="bg1"/>
+                </a:solidFill>
+              </a:rPr>
+            </a:br>
+            <a:r>
+              <a:rPr lang="en-US" dirty="0">
+                <a:solidFill>
+                  <a:schemeClr val="bg1"/>
+                </a:solidFill>
+              </a:rPr>
+              <a:t>(CRM) System</a:t>
+            </a:r>
+          </a:p>
+        </p:txBody>
+      </p:sp>
+      <p:sp>
+        <p:nvSpPr>
+          <p:cNvPr id="8" name="TextBox 7">
+            <a:extLst>
+              <a:ext uri="{FF2B5EF4-FFF2-40B4-BE49-F238E27FC236}">
+                <a16:creationId xmlns:a16="http://schemas.microsoft.com/office/drawing/2014/main" id="{6F6FAC05-0920-E90A-A713-EEE84FF8B9A4}"/>
+              </a:ext>
+            </a:extLst>
+          </p:cNvPr>
+          <p:cNvSpPr txBox="1"/>
+          <p:nvPr/>
+        </p:nvSpPr>
+        <p:spPr>
+          <a:xfrm>
+            <a:off x="5036022" y="3924950"/>
+            <a:ext cx="1909498" cy="923330"/>
+          </a:xfrm>
+          <a:prstGeom prst="rect">
+            <a:avLst/>
+          </a:prstGeom>
+          <a:noFill/>
+        </p:spPr>
+        <p:txBody>
+          <a:bodyPr wrap="none" rtlCol="0">
+            <a:spAutoFit/>
+          </a:bodyPr>
+          <a:lstStyle/>
+          <a:p>
+            <a:pPr algn="ctr"/>
+            <a:r>
+              <a:rPr lang="en-US" dirty="0">
+                <a:solidFill>
+                  <a:schemeClr val="bg1"/>
+                </a:solidFill>
+              </a:rPr>
+              <a:t>KRISH SHINDE</a:t>
+            </a:r>
+          </a:p>
+          <a:p>
+            <a:pPr algn="ctr"/>
+            <a:r>
+              <a:rPr lang="en-US" dirty="0">
+                <a:solidFill>
+                  <a:schemeClr val="bg1"/>
+                </a:solidFill>
+              </a:rPr>
+              <a:t>150096725004</a:t>
+            </a:r>
+          </a:p>
+          <a:p>
+            <a:endParaRPr lang="en-US" dirty="0"/>
+          </a:p>
+        </p:txBody>
+      </p:sp>
+      <p:pic>
+        <p:nvPicPr>
+          <p:cNvPr id="1028" name="Picture 4">
+            <a:extLst>
+              <a:ext uri="{FF2B5EF4-FFF2-40B4-BE49-F238E27FC236}">
+                <a16:creationId xmlns:a16="http://schemas.microsoft.com/office/drawing/2014/main" id="{B8C3EFBE-6210-063A-58E4-432217235570}"/>
+              </a:ext>
+            </a:extLst>
+          </p:cNvPr>
+          <p:cNvPicPr>
+            <a:picLocks noChangeAspect="1" noChangeArrowheads="1"/>
+          </p:cNvPicPr>
+          <p:nvPr/>
+        </p:nvPicPr>
+        <p:blipFill>
+          <a:blip r:embed="rId4">
+            <a:extLst>
+              <a:ext uri="{28A0092B-C50C-407E-A947-70E740481C1C}">
+                <a14:useLocalDpi xmlns:a14="http://schemas.microsoft.com/office/drawing/2010/main" val="0"/>
+              </a:ext>
+            </a:extLst>
+          </a:blip>
+          <a:srcRect/>
+          <a:stretch>
+            <a:fillRect/>
+          </a:stretch>
+        </p:blipFill>
+        <p:spPr bwMode="auto">
+          <a:xfrm>
+            <a:off x="3549649" y="1503329"/>
+            <a:ext cx="5092700" cy="1600200"/>
+          </a:xfrm>
+          <a:prstGeom prst="rect">
+            <a:avLst/>
+          </a:prstGeom>
+          <a:noFill/>
+          <a:extLst>
+            <a:ext uri="{909E8E84-426E-40DD-AFC4-6F175D3DCCD1}">
+              <a14:hiddenFill xmlns:a14="http://schemas.microsoft.com/office/drawing/2010/main">
+                <a:solidFill>
+                  <a:srgbClr val="FFFFFF"/>
+                </a:solidFill>
+              </a14:hiddenFill>
+            </a:ext>
+          </a:extLst>
+        </p:spPr>
+      </p:pic>
     </p:spTree>
     <p:extLst>
       <p:ext uri="{BB962C8B-B14F-4D97-AF65-F5344CB8AC3E}">
@@ -4012,6 +4194,53 @@
           </a:p>
         </p:txBody>
       </p:sp>
+      <p:pic>
+        <p:nvPicPr>
+          <p:cNvPr id="5" name="Picture 4">
+            <a:extLst>
+              <a:ext uri="{FF2B5EF4-FFF2-40B4-BE49-F238E27FC236}">
+                <a16:creationId xmlns:a16="http://schemas.microsoft.com/office/drawing/2014/main" id="{FDCCC24E-561B-41E5-A7ED-FE1F94BBAD0E}"/>
+              </a:ext>
+            </a:extLst>
+          </p:cNvPr>
+          <p:cNvPicPr>
+            <a:picLocks noChangeAspect="1" noChangeArrowheads="1"/>
+          </p:cNvPicPr>
+          <p:nvPr/>
+        </p:nvPicPr>
+        <p:blipFill>
+          <a:blip r:embed="rId2">
+            <a:extLst>
+              <a:ext uri="{28A0092B-C50C-407E-A947-70E740481C1C}">
+                <a14:useLocalDpi xmlns:a14="http://schemas.microsoft.com/office/drawing/2010/main" val="0"/>
+              </a:ext>
+            </a:extLst>
+          </a:blip>
+          <a:srcRect/>
+          <a:stretch>
+            <a:fillRect/>
+          </a:stretch>
+        </p:blipFill>
+        <p:spPr bwMode="auto">
+          <a:xfrm>
+            <a:off x="10751474" y="6164234"/>
+            <a:ext cx="693766" cy="693766"/>
+          </a:xfrm>
+          <a:prstGeom prst="rect">
+            <a:avLst/>
+          </a:prstGeom>
+          <a:noFill/>
+          <a:extLst>
+            <a:ext uri="{909E8E84-426E-40DD-AFC4-6F175D3DCCD1}">
+              <a14:hiddenFill xmlns:a14="http://schemas.microsoft.com/office/drawing/2010/main">
+                <a:solidFill>
+                  <a:srgbClr val="FFFFFF"/>
+                </a:solidFill>
+              </a14:hiddenFill>
+            </a:ext>
+          </a:extLst>
+        </p:spPr>
+      </p:pic>
     </p:spTree>
     <p:extLst>
       <p:ext uri="{BB962C8B-B14F-4D97-AF65-F5344CB8AC3E}">
@@ -4238,6 +4467,53 @@
           </a:p>
         </p:txBody>
       </p:sp>
+      <p:pic>
+        <p:nvPicPr>
+          <p:cNvPr id="5" name="Picture 4">
+            <a:extLst>
+              <a:ext uri="{FF2B5EF4-FFF2-40B4-BE49-F238E27FC236}">
+                <a16:creationId xmlns:a16="http://schemas.microsoft.com/office/drawing/2014/main" id="{0C596829-61DF-149B-B5B6-6CA325C8C420}"/>
+              </a:ext>
+            </a:extLst>
+          </p:cNvPr>
+          <p:cNvPicPr>
+            <a:picLocks noChangeAspect="1" noChangeArrowheads="1"/>
+          </p:cNvPicPr>
+          <p:nvPr/>
+        </p:nvPicPr>
+        <p:blipFill>
+          <a:blip r:embed="rId2">
+            <a:extLst>
+              <a:ext uri="{28A0092B-C50C-407E-A947-70E740481C1C}">
+                <a14:useLocalDpi xmlns:a14="http://schemas.microsoft.com/office/drawing/2010/main" val="0"/>
+              </a:ext>
+            </a:extLst>
+          </a:blip>
+          <a:srcRect/>
+          <a:stretch>
+            <a:fillRect/>
+          </a:stretch>
+        </p:blipFill>
+        <p:spPr bwMode="auto">
+          <a:xfrm>
+            <a:off x="10751474" y="6164234"/>
+            <a:ext cx="693766" cy="693766"/>
+          </a:xfrm>
+          <a:prstGeom prst="rect">
+            <a:avLst/>
+          </a:prstGeom>
+          <a:noFill/>
+          <a:extLst>
+            <a:ext uri="{909E8E84-426E-40DD-AFC4-6F175D3DCCD1}">
+              <a14:hiddenFill xmlns:a14="http://schemas.microsoft.com/office/drawing/2010/main">
+                <a:solidFill>
+                  <a:srgbClr val="FFFFFF"/>
+                </a:solidFill>
+              </a14:hiddenFill>
+            </a:ext>
+          </a:extLst>
+        </p:spPr>
+      </p:pic>
     </p:spTree>
     <p:extLst>
       <p:ext uri="{BB962C8B-B14F-4D97-AF65-F5344CB8AC3E}">
@@ -4405,6 +4681,53 @@
           </a:p>
         </p:txBody>
       </p:sp>
+      <p:pic>
+        <p:nvPicPr>
+          <p:cNvPr id="4" name="Picture 3">
+            <a:extLst>
+              <a:ext uri="{FF2B5EF4-FFF2-40B4-BE49-F238E27FC236}">
+                <a16:creationId xmlns:a16="http://schemas.microsoft.com/office/drawing/2014/main" id="{3D199349-5DB2-490C-EB8C-5C096D33E5F3}"/>
+              </a:ext>
+            </a:extLst>
+          </p:cNvPr>
+          <p:cNvPicPr>
+            <a:picLocks noChangeAspect="1" noChangeArrowheads="1"/>
+          </p:cNvPicPr>
+          <p:nvPr/>
+        </p:nvPicPr>
+        <p:blipFill>
+          <a:blip r:embed="rId2">
+            <a:extLst>
+              <a:ext uri="{28A0092B-C50C-407E-A947-70E740481C1C}">
+                <a14:useLocalDpi xmlns:a14="http://schemas.microsoft.com/office/drawing/2010/main" val="0"/>
+              </a:ext>
+            </a:extLst>
+          </a:blip>
+          <a:srcRect/>
+          <a:stretch>
+            <a:fillRect/>
+          </a:stretch>
+        </p:blipFill>
+        <p:spPr bwMode="auto">
+          <a:xfrm>
+            <a:off x="10751474" y="6164234"/>
+            <a:ext cx="693766" cy="693766"/>
+          </a:xfrm>
+          <a:prstGeom prst="rect">
+            <a:avLst/>
+          </a:prstGeom>
+          <a:noFill/>
+          <a:extLst>
+            <a:ext uri="{909E8E84-426E-40DD-AFC4-6F175D3DCCD1}">
+              <a14:hiddenFill xmlns:a14="http://schemas.microsoft.com/office/drawing/2010/main">
+                <a:solidFill>
+                  <a:srgbClr val="FFFFFF"/>
+                </a:solidFill>
+              </a14:hiddenFill>
+            </a:ext>
+          </a:extLst>
+        </p:spPr>
+      </p:pic>
     </p:spTree>
     <p:extLst>
       <p:ext uri="{BB962C8B-B14F-4D97-AF65-F5344CB8AC3E}">
@@ -4537,7 +4860,7 @@
         </p:nvSpPr>
         <p:spPr>
           <a:xfrm>
-            <a:off x="704088" y="914400"/>
+            <a:off x="804672" y="914400"/>
             <a:ext cx="3799763" cy="1473200"/>
           </a:xfrm>
         </p:spPr>
@@ -4734,6 +5057,53 @@
           <a:prstGeom prst="rect">
             <a:avLst/>
           </a:prstGeom>
+        </p:spPr>
+      </p:pic>
+      <p:pic>
+        <p:nvPicPr>
+          <p:cNvPr id="5" name="Picture 4">
+            <a:extLst>
+              <a:ext uri="{FF2B5EF4-FFF2-40B4-BE49-F238E27FC236}">
+                <a16:creationId xmlns:a16="http://schemas.microsoft.com/office/drawing/2014/main" id="{A4684909-7EAA-3CF4-8B73-A232F69567F2}"/>
+              </a:ext>
+            </a:extLst>
+          </p:cNvPr>
+          <p:cNvPicPr>
+            <a:picLocks noChangeAspect="1" noChangeArrowheads="1"/>
+          </p:cNvPicPr>
+          <p:nvPr/>
+        </p:nvPicPr>
+        <p:blipFill>
+          <a:blip r:embed="rId3">
+            <a:extLst>
+              <a:ext uri="{28A0092B-C50C-407E-A947-70E740481C1C}">
+                <a14:useLocalDpi xmlns:a14="http://schemas.microsoft.com/office/drawing/2010/main" val="0"/>
+              </a:ext>
+            </a:extLst>
+          </a:blip>
+          <a:srcRect/>
+          <a:stretch>
+            <a:fillRect/>
+          </a:stretch>
+        </p:blipFill>
+        <p:spPr bwMode="auto">
+          <a:xfrm>
+            <a:off x="10751474" y="6164234"/>
+            <a:ext cx="693766" cy="693766"/>
+          </a:xfrm>
+          <a:prstGeom prst="rect">
+            <a:avLst/>
+          </a:prstGeom>
+          <a:noFill/>
+          <a:extLst>
+            <a:ext uri="{909E8E84-426E-40DD-AFC4-6F175D3DCCD1}">
+              <a14:hiddenFill xmlns:a14="http://schemas.microsoft.com/office/drawing/2010/main">
+                <a:solidFill>
+                  <a:srgbClr val="FFFFFF"/>
+                </a:solidFill>
+              </a14:hiddenFill>
+            </a:ext>
+          </a:extLst>
         </p:spPr>
       </p:pic>
     </p:spTree>
@@ -4899,10 +5269,364 @@
           </a:p>
         </p:txBody>
       </p:sp>
+      <p:pic>
+        <p:nvPicPr>
+          <p:cNvPr id="5" name="Picture 4">
+            <a:extLst>
+              <a:ext uri="{FF2B5EF4-FFF2-40B4-BE49-F238E27FC236}">
+                <a16:creationId xmlns:a16="http://schemas.microsoft.com/office/drawing/2014/main" id="{CDC82338-744D-8958-90F6-515E17CDB2FF}"/>
+              </a:ext>
+            </a:extLst>
+          </p:cNvPr>
+          <p:cNvPicPr>
+            <a:picLocks noChangeAspect="1" noChangeArrowheads="1"/>
+          </p:cNvPicPr>
+          <p:nvPr/>
+        </p:nvPicPr>
+        <p:blipFill>
+          <a:blip r:embed="rId2">
+            <a:extLst>
+              <a:ext uri="{28A0092B-C50C-407E-A947-70E740481C1C}">
+                <a14:useLocalDpi xmlns:a14="http://schemas.microsoft.com/office/drawing/2010/main" val="0"/>
+              </a:ext>
+            </a:extLst>
+          </a:blip>
+          <a:srcRect/>
+          <a:stretch>
+            <a:fillRect/>
+          </a:stretch>
+        </p:blipFill>
+        <p:spPr bwMode="auto">
+          <a:xfrm>
+            <a:off x="10751474" y="6164234"/>
+            <a:ext cx="693766" cy="693766"/>
+          </a:xfrm>
+          <a:prstGeom prst="rect">
+            <a:avLst/>
+          </a:prstGeom>
+          <a:noFill/>
+          <a:extLst>
+            <a:ext uri="{909E8E84-426E-40DD-AFC4-6F175D3DCCD1}">
+              <a14:hiddenFill xmlns:a14="http://schemas.microsoft.com/office/drawing/2010/main">
+                <a:solidFill>
+                  <a:srgbClr val="FFFFFF"/>
+                </a:solidFill>
+              </a14:hiddenFill>
+            </a:ext>
+          </a:extLst>
+        </p:spPr>
+      </p:pic>
     </p:spTree>
     <p:extLst>
       <p:ext uri="{BB962C8B-B14F-4D97-AF65-F5344CB8AC3E}">
         <p14:creationId xmlns:p14="http://schemas.microsoft.com/office/powerpoint/2010/main" val="1550439945"/>
+      </p:ext>
+    </p:extLst>
+  </p:cSld>
+  <p:clrMapOvr>
+    <a:masterClrMapping/>
+  </p:clrMapOvr>
+</p:sld>
+</file>
+
+<file path=ppt/slides/slide7.xml><?xml version="1.0" encoding="utf-8"?>
+<p:sld xmlns:a="http://schemas.openxmlformats.org/drawingml/2006/main" xmlns:r="http://schemas.openxmlformats.org/officeDocument/2006/relationships" xmlns:p="http://schemas.openxmlformats.org/presentationml/2006/main">
+  <p:cSld>
+    <p:bg>
+      <p:bgPr>
+        <a:solidFill>
+          <a:schemeClr val="bg1"/>
+        </a:solidFill>
+        <a:effectLst/>
+      </p:bgPr>
+    </p:bg>
+    <p:spTree>
+      <p:nvGrpSpPr>
+        <p:cNvPr id="1" name=""/>
+        <p:cNvGrpSpPr/>
+        <p:nvPr/>
+      </p:nvGrpSpPr>
+      <p:grpSpPr>
+        <a:xfrm>
+          <a:off x="0" y="0"/>
+          <a:ext cx="0" cy="0"/>
+          <a:chOff x="0" y="0"/>
+          <a:chExt cx="0" cy="0"/>
+        </a:xfrm>
+      </p:grpSpPr>
+      <p:cxnSp>
+        <p:nvCxnSpPr>
+          <p:cNvPr id="9" name="Straight Connector 8">
+            <a:extLst>
+              <a:ext uri="{FF2B5EF4-FFF2-40B4-BE49-F238E27FC236}">
+                <a16:creationId xmlns:a16="http://schemas.microsoft.com/office/drawing/2014/main" id="{F64F9B95-9045-48D2-B9F3-2927E98F54AA}"/>
+              </a:ext>
+              <a:ext uri="{C183D7F6-B498-43B3-948B-1728B52AA6E4}">
+                <adec:decorative xmlns:adec="http://schemas.microsoft.com/office/drawing/2017/decorative" val="1"/>
+              </a:ext>
+            </a:extLst>
+          </p:cNvPr>
+          <p:cNvCxnSpPr>
+            <a:cxnSpLocks noGrp="1" noRot="1" noChangeAspect="1" noMove="1" noResize="1" noEditPoints="1" noAdjustHandles="1" noChangeArrowheads="1" noChangeShapeType="1"/>
+          </p:cNvCxnSpPr>
+          <p:nvPr>
+            <p:extLst>
+              <p:ext uri="{386F3935-93C4-4BCD-93E2-E3B085C9AB24}">
+                <p16:designElem xmlns:p16="http://schemas.microsoft.com/office/powerpoint/2015/main" val="1"/>
+              </p:ext>
+            </p:extLst>
+          </p:nvPr>
+        </p:nvCxnSpPr>
+        <p:spPr>
+          <a:xfrm>
+            <a:off x="800100" y="723900"/>
+            <a:ext cx="10591800" cy="0"/>
+          </a:xfrm>
+          <a:prstGeom prst="line">
+            <a:avLst/>
+          </a:prstGeom>
+          <a:ln w="44450">
+            <a:solidFill>
+              <a:schemeClr val="tx1"/>
+            </a:solidFill>
+          </a:ln>
+        </p:spPr>
+        <p:style>
+          <a:lnRef idx="1">
+            <a:schemeClr val="accent1"/>
+          </a:lnRef>
+          <a:fillRef idx="0">
+            <a:schemeClr val="accent1"/>
+          </a:fillRef>
+          <a:effectRef idx="0">
+            <a:schemeClr val="accent1"/>
+          </a:effectRef>
+          <a:fontRef idx="minor">
+            <a:schemeClr val="tx1"/>
+          </a:fontRef>
+        </p:style>
+      </p:cxnSp>
+      <p:cxnSp>
+        <p:nvCxnSpPr>
+          <p:cNvPr id="11" name="Straight Connector 10">
+            <a:extLst>
+              <a:ext uri="{FF2B5EF4-FFF2-40B4-BE49-F238E27FC236}">
+                <a16:creationId xmlns:a16="http://schemas.microsoft.com/office/drawing/2014/main" id="{085AA86F-6A4D-4BCB-A045-D992CDC2959B}"/>
+              </a:ext>
+              <a:ext uri="{C183D7F6-B498-43B3-948B-1728B52AA6E4}">
+                <adec:decorative xmlns:adec="http://schemas.microsoft.com/office/drawing/2017/decorative" val="1"/>
+              </a:ext>
+            </a:extLst>
+          </p:cNvPr>
+          <p:cNvCxnSpPr>
+            <a:cxnSpLocks noGrp="1" noRot="1" noChangeAspect="1" noMove="1" noResize="1" noEditPoints="1" noAdjustHandles="1" noChangeArrowheads="1" noChangeShapeType="1"/>
+          </p:cNvCxnSpPr>
+          <p:nvPr>
+            <p:extLst>
+              <p:ext uri="{386F3935-93C4-4BCD-93E2-E3B085C9AB24}">
+                <p16:designElem xmlns:p16="http://schemas.microsoft.com/office/powerpoint/2015/main" val="1"/>
+              </p:ext>
+            </p:extLst>
+          </p:nvPr>
+        </p:nvCxnSpPr>
+        <p:spPr>
+          <a:xfrm>
+            <a:off x="800100" y="6142781"/>
+            <a:ext cx="10591800" cy="0"/>
+          </a:xfrm>
+          <a:prstGeom prst="line">
+            <a:avLst/>
+          </a:prstGeom>
+          <a:ln w="12700">
+            <a:solidFill>
+              <a:schemeClr val="tx1"/>
+            </a:solidFill>
+          </a:ln>
+        </p:spPr>
+        <p:style>
+          <a:lnRef idx="1">
+            <a:schemeClr val="accent1"/>
+          </a:lnRef>
+          <a:fillRef idx="0">
+            <a:schemeClr val="accent1"/>
+          </a:fillRef>
+          <a:effectRef idx="0">
+            <a:schemeClr val="accent1"/>
+          </a:effectRef>
+          <a:fontRef idx="minor">
+            <a:schemeClr val="tx1"/>
+          </a:fontRef>
+        </p:style>
+      </p:cxnSp>
+      <p:sp>
+        <p:nvSpPr>
+          <p:cNvPr id="13" name="Rectangle 12">
+            <a:extLst>
+              <a:ext uri="{FF2B5EF4-FFF2-40B4-BE49-F238E27FC236}">
+                <a16:creationId xmlns:a16="http://schemas.microsoft.com/office/drawing/2014/main" id="{479833C7-FDE4-4657-B0B1-32BE833C2489}"/>
+              </a:ext>
+              <a:ext uri="{C183D7F6-B498-43B3-948B-1728B52AA6E4}">
+                <adec:decorative xmlns:adec="http://schemas.microsoft.com/office/drawing/2017/decorative" val="1"/>
+              </a:ext>
+            </a:extLst>
+          </p:cNvPr>
+          <p:cNvSpPr>
+            <a:spLocks noGrp="1" noRot="1" noChangeAspect="1" noMove="1" noResize="1" noEditPoints="1" noAdjustHandles="1" noChangeArrowheads="1" noChangeShapeType="1" noTextEdit="1"/>
+          </p:cNvSpPr>
+          <p:nvPr>
+            <p:extLst>
+              <p:ext uri="{386F3935-93C4-4BCD-93E2-E3B085C9AB24}">
+                <p16:designElem xmlns:p16="http://schemas.microsoft.com/office/powerpoint/2015/main" val="1"/>
+              </p:ext>
+            </p:extLst>
+          </p:nvPr>
+        </p:nvSpPr>
+        <p:spPr>
+          <a:xfrm>
+            <a:off x="0" y="0"/>
+            <a:ext cx="12192000" cy="6858000"/>
+          </a:xfrm>
+          <a:prstGeom prst="rect">
+            <a:avLst/>
+          </a:prstGeom>
+          <a:solidFill>
+            <a:schemeClr val="bg1"/>
+          </a:solidFill>
+          <a:ln w="12700" cap="flat" cmpd="sng" algn="ctr">
+            <a:noFill/>
+            <a:prstDash val="solid"/>
+            <a:miter lim="800000"/>
+          </a:ln>
+          <a:effectLst/>
+        </p:spPr>
+        <p:style>
+          <a:lnRef idx="2">
+            <a:schemeClr val="accent1">
+              <a:shade val="50000"/>
+            </a:schemeClr>
+          </a:lnRef>
+          <a:fillRef idx="1">
+            <a:schemeClr val="accent1"/>
+          </a:fillRef>
+          <a:effectRef idx="0">
+            <a:schemeClr val="accent1"/>
+          </a:effectRef>
+          <a:fontRef idx="minor">
+            <a:schemeClr val="lt1"/>
+          </a:fontRef>
+        </p:style>
+        <p:txBody>
+          <a:bodyPr rtlCol="0" anchor="ctr"/>
+          <a:lstStyle/>
+          <a:p>
+            <a:pPr algn="ctr"/>
+            <a:endParaRPr lang="en-US"/>
+          </a:p>
+        </p:txBody>
+      </p:sp>
+      <p:sp>
+        <p:nvSpPr>
+          <p:cNvPr id="15" name="Rectangle 14">
+            <a:extLst>
+              <a:ext uri="{FF2B5EF4-FFF2-40B4-BE49-F238E27FC236}">
+                <a16:creationId xmlns:a16="http://schemas.microsoft.com/office/drawing/2014/main" id="{0ABE7C0B-A2D9-4202-A524-532DA2E2D582}"/>
+              </a:ext>
+              <a:ext uri="{C183D7F6-B498-43B3-948B-1728B52AA6E4}">
+                <adec:decorative xmlns:adec="http://schemas.microsoft.com/office/drawing/2017/decorative" val="1"/>
+              </a:ext>
+            </a:extLst>
+          </p:cNvPr>
+          <p:cNvSpPr>
+            <a:spLocks noGrp="1" noRot="1" noChangeAspect="1" noMove="1" noResize="1" noEditPoints="1" noAdjustHandles="1" noChangeArrowheads="1" noChangeShapeType="1" noTextEdit="1"/>
+          </p:cNvSpPr>
+          <p:nvPr>
+            <p:extLst>
+              <p:ext uri="{386F3935-93C4-4BCD-93E2-E3B085C9AB24}">
+                <p16:designElem xmlns:p16="http://schemas.microsoft.com/office/powerpoint/2015/main" val="1"/>
+              </p:ext>
+            </p:extLst>
+          </p:nvPr>
+        </p:nvSpPr>
+        <p:spPr>
+          <a:xfrm>
+            <a:off x="0" y="0"/>
+            <a:ext cx="12192000" cy="6858000"/>
+          </a:xfrm>
+          <a:prstGeom prst="rect">
+            <a:avLst/>
+          </a:prstGeom>
+          <a:solidFill>
+            <a:schemeClr val="bg1"/>
+          </a:solidFill>
+          <a:ln w="12700" cap="flat" cmpd="sng" algn="ctr">
+            <a:noFill/>
+            <a:prstDash val="solid"/>
+            <a:miter lim="800000"/>
+          </a:ln>
+          <a:effectLst/>
+        </p:spPr>
+        <p:style>
+          <a:lnRef idx="2">
+            <a:schemeClr val="accent1">
+              <a:shade val="50000"/>
+            </a:schemeClr>
+          </a:lnRef>
+          <a:fillRef idx="1">
+            <a:schemeClr val="accent1"/>
+          </a:fillRef>
+          <a:effectRef idx="0">
+            <a:schemeClr val="accent1"/>
+          </a:effectRef>
+          <a:fontRef idx="minor">
+            <a:schemeClr val="lt1"/>
+          </a:fontRef>
+        </p:style>
+        <p:txBody>
+          <a:bodyPr rtlCol="0" anchor="ctr"/>
+          <a:lstStyle/>
+          <a:p>
+            <a:pPr algn="ctr"/>
+            <a:endParaRPr lang="en-US"/>
+          </a:p>
+        </p:txBody>
+      </p:sp>
+      <p:pic>
+        <p:nvPicPr>
+          <p:cNvPr id="4" name="Content Placeholder 3">
+            <a:extLst>
+              <a:ext uri="{FF2B5EF4-FFF2-40B4-BE49-F238E27FC236}">
+                <a16:creationId xmlns:a16="http://schemas.microsoft.com/office/drawing/2014/main" id="{4E19629C-62B3-C1CC-1EE3-789238EAA5BE}"/>
+              </a:ext>
+            </a:extLst>
+          </p:cNvPr>
+          <p:cNvPicPr>
+            <a:picLocks noGrp="1" noChangeAspect="1"/>
+          </p:cNvPicPr>
+          <p:nvPr>
+            <p:ph idx="1"/>
+          </p:nvPr>
+        </p:nvPicPr>
+        <p:blipFill>
+          <a:blip r:embed="rId2"/>
+          <a:srcRect b="443"/>
+          <a:stretch>
+            <a:fillRect/>
+          </a:stretch>
+        </p:blipFill>
+        <p:spPr>
+          <a:xfrm>
+            <a:off x="20" y="10"/>
+            <a:ext cx="12191979" cy="6857989"/>
+          </a:xfrm>
+          <a:prstGeom prst="rect">
+            <a:avLst/>
+          </a:prstGeom>
+        </p:spPr>
+      </p:pic>
+    </p:spTree>
+    <p:extLst>
+      <p:ext uri="{BB962C8B-B14F-4D97-AF65-F5344CB8AC3E}">
+        <p14:creationId xmlns:p14="http://schemas.microsoft.com/office/powerpoint/2010/main" val="3263410467"/>
       </p:ext>
     </p:extLst>
   </p:cSld>
